--- a/public/artifacts/jahez-board-deck.pptx
+++ b/public/artifacts/jahez-board-deck.pptx
@@ -1356,7 +1356,7 @@
                 <a:ea typeface="Arial" pitchFamily="34" charset="-122"/>
                 <a:cs typeface="Arial" pitchFamily="34" charset="-120"/>
               </a:rPr>
-              <a:t>Prepared by Faheem for Lunar Investments — Advisory only. Not investment advice.</a:t>
+              <a:t>Prepared by Faheem for Lunar Investments, Advisory only. Not investment advice.</a:t>
             </a:r>
             <a:endParaRPr lang="en-US" sz="750" dirty="0"/>
           </a:p>
@@ -1794,7 +1794,7 @@
                 <a:ea typeface="Georgia" pitchFamily="34" charset="-122"/>
                 <a:cs typeface="Georgia" pitchFamily="34" charset="-120"/>
               </a:rPr>
-              <a:t>Investment Thesis — Jahez International (Tadawul: 6017)</a:t>
+              <a:t>Investment Thesis, Jahez International (Tadawul: 6017)</a:t>
             </a:r>
             <a:endParaRPr lang="en-US" sz="2300" dirty="0"/>
           </a:p>
@@ -2149,7 +2149,7 @@
                 <a:ea typeface="Arial" pitchFamily="34" charset="-122"/>
                 <a:cs typeface="Arial" pitchFamily="34" charset="-120"/>
               </a:rPr>
-              <a:t>FY25 EBITDA margin of 8.3% is one-off-depressed, not structurally broken — Q1-26 adj. EBITDA of SAR 43.6m stayed positive through a net-loss quarter</a:t>
+              <a:t>FY25 EBITDA margin of 8.3% is one-off-depressed, not structurally broken, Q1-26 adj. EBITDA of SAR 43.6m stayed positive through a net-loss quarter</a:t>
             </a:r>
             <a:endParaRPr lang="en-US" sz="1050" dirty="0"/>
           </a:p>
@@ -2275,7 +2275,7 @@
                 <a:ea typeface="Arial" pitchFamily="34" charset="-122"/>
                 <a:cs typeface="Arial" pitchFamily="34" charset="-120"/>
               </a:rPr>
-              <a:t>Shariah PASS, SAR 16.6m net cash, Tadawul-listed liquidity — clears Lunar's 15.0% hurdle at a 16.8% weighted return</a:t>
+              <a:t>Compliance PASS, SAR 16.6m net cash, Tadawul-listed liquidity, clears Lunar's 15.0% hurdle at a 16.8% weighted return</a:t>
             </a:r>
             <a:endParaRPr lang="en-US" sz="1050" dirty="0"/>
           </a:p>
@@ -2314,7 +2314,7 @@
                 <a:ea typeface="Arial" pitchFamily="34" charset="-122"/>
                 <a:cs typeface="Arial" pitchFamily="34" charset="-120"/>
               </a:rPr>
-              <a:t>Source: Faheem Valuation Model — see IC memo and workbook for the full source trail. Advisory only — the Investment Committee decides.</a:t>
+              <a:t>Source: Faheem Valuation Model, see IC memo and workbook for the full source trail. Advisory only, the Investment Committee decides.</a:t>
             </a:r>
             <a:endParaRPr lang="en-US" sz="800" dirty="0"/>
           </a:p>
@@ -2465,7 +2465,7 @@
                 <a:ea typeface="Arial" pitchFamily="34" charset="-122"/>
                 <a:cs typeface="Arial" pitchFamily="34" charset="-120"/>
               </a:rPr>
-              <a:t>Competitive dynamics — qualitative positioning only, no invented market-share figures</a:t>
+              <a:t>Competitive dynamics, qualitative positioning only, no invented market-share figures</a:t>
             </a:r>
             <a:endParaRPr lang="en-US" sz="1150" dirty="0"/>
           </a:p>
@@ -2570,7 +2570,7 @@
                 <a:ea typeface="Arial" pitchFamily="34" charset="-122"/>
                 <a:cs typeface="Arial" pitchFamily="34" charset="-120"/>
               </a:rPr>
-              <a:t>Incumbent KSA platform diversifying into logistics — FY25 GMV SAR 7,245.2m, 111.6m orders</a:t>
+              <a:t>Incumbent KSA platform diversifying into logistics, FY25 GMV SAR 7,245.2m, 111.6m orders</a:t>
             </a:r>
             <a:endParaRPr lang="en-US" sz="1050" dirty="0"/>
           </a:p>
@@ -2924,7 +2924,7 @@
                 <a:ea typeface="Arial" pitchFamily="34" charset="-122"/>
                 <a:cs typeface="Arial" pitchFamily="34" charset="-120"/>
               </a:rPr>
-              <a:t>Source: Industry &amp; News Pack — Saudi Quick-Commerce, p.2, p.4</a:t>
+              <a:t>Source: Industry &amp; News Pack · Saudi Quick-Commerce, p.2, p.4</a:t>
             </a:r>
             <a:endParaRPr lang="en-US" sz="800" dirty="0"/>
           </a:p>
@@ -3880,7 +3880,7 @@
                 <a:ea typeface="Georgia" pitchFamily="34" charset="-122"/>
                 <a:cs typeface="Georgia" pitchFamily="34" charset="-120"/>
               </a:rPr>
-              <a:t>Valuation — DCF vs Trading Comps</a:t>
+              <a:t>Valuation, DCF vs Trading Comps</a:t>
             </a:r>
             <a:endParaRPr lang="en-US" sz="2300" dirty="0"/>
           </a:p>
@@ -4566,7 +4566,7 @@
                 <a:ea typeface="Arial" pitchFamily="34" charset="-122"/>
                 <a:cs typeface="Arial" pitchFamily="34" charset="-120"/>
               </a:rPr>
-              <a:t>DCF target — SAR 14.36</a:t>
+              <a:t>DCF target, SAR 14.36</a:t>
             </a:r>
             <a:endParaRPr lang="en-US" sz="900" dirty="0"/>
           </a:p>
@@ -4628,7 +4628,7 @@
                 <a:ea typeface="Arial" pitchFamily="34" charset="-122"/>
                 <a:cs typeface="Arial" pitchFamily="34" charset="-120"/>
               </a:rPr>
-              <a:t>Current — SAR 12.79</a:t>
+              <a:t>Current, SAR 12.79</a:t>
             </a:r>
             <a:endParaRPr lang="en-US" sz="850" dirty="0"/>
           </a:p>
@@ -5212,7 +5212,7 @@
                 <a:ea typeface="Arial" pitchFamily="34" charset="-122"/>
                 <a:cs typeface="Arial" pitchFamily="34" charset="-120"/>
               </a:rPr>
-              <a:t>Lunar hurdle — 15.0%</a:t>
+              <a:t>Lunar hurdle, 15.0%</a:t>
             </a:r>
             <a:endParaRPr lang="en-US" sz="1000" dirty="0"/>
           </a:p>
@@ -5251,7 +5251,7 @@
                 <a:ea typeface="Arial" pitchFamily="34" charset="-122"/>
                 <a:cs typeface="Arial" pitchFamily="34" charset="-120"/>
               </a:rPr>
-              <a:t>Source: Faheem Valuation Model — Scenarios &amp; Risk tab</a:t>
+              <a:t>Source: Faheem Valuation Model, Scenarios &amp; Risk tab</a:t>
             </a:r>
             <a:endParaRPr lang="en-US" sz="800" dirty="0"/>
           </a:p>
@@ -5402,7 +5402,7 @@
                 <a:ea typeface="Arial" pitchFamily="34" charset="-122"/>
                 <a:cs typeface="Arial" pitchFamily="34" charset="-120"/>
               </a:rPr>
-              <a:t>Probability x impact, 1-5 scale — composite score 5.5 / 10</a:t>
+              <a:t>Probability x impact, 1-5 scale, composite score 5.5 / 10</a:t>
             </a:r>
             <a:endParaRPr lang="en-US" sz="1150" dirty="0"/>
           </a:p>
@@ -8426,7 +8426,7 @@
                 <a:ea typeface="Arial" pitchFamily="34" charset="-122"/>
                 <a:cs typeface="Arial" pitchFamily="34" charset="-120"/>
               </a:rPr>
-              <a:t>Source: Industry &amp; News Pack, Market Data &amp; Comparables Snapshot, Q4 2025 Earnings Results, FY2025 Earnings Call — see register for exact pages</a:t>
+              <a:t>Source: Industry &amp; News Pack, Market Data &amp; Comparables Snapshot, Q4 2025 Earnings Results, FY2025 Earnings Call, see register for exact pages</a:t>
             </a:r>
             <a:endParaRPr lang="en-US" sz="800" dirty="0"/>
           </a:p>
@@ -8538,7 +8538,7 @@
                 <a:ea typeface="Georgia" pitchFamily="34" charset="-122"/>
                 <a:cs typeface="Georgia" pitchFamily="34" charset="-120"/>
               </a:rPr>
-              <a:t>Mandate Fit — Lunar IC Charter</a:t>
+              <a:t>Mandate Fit, Lunar IC Charter</a:t>
             </a:r>
             <a:endParaRPr lang="en-US" sz="2300" dirty="0"/>
           </a:p>
@@ -9557,7 +9557,7 @@
                           <a:ea typeface="Arial" pitchFamily="34" charset="-122"/>
                           <a:cs typeface="Arial" pitchFamily="34" charset="-120"/>
                         </a:rPr>
-                        <a:t>Sized within cap — final ticket sizing is an IC decision</a:t>
+                        <a:t>Sized within cap, final ticket sizing is an IC decision</a:t>
                       </a:r>
                       <a:endParaRPr lang="en-US" sz="1000" dirty="0">
                         <a:latin typeface="Arial" charset="0"/>
@@ -9951,7 +9951,7 @@
                           <a:ea typeface="Arial" pitchFamily="34" charset="-122"/>
                           <a:cs typeface="Arial" pitchFamily="34" charset="-120"/>
                         </a:rPr>
-                        <a:t>Shariah screen</a:t>
+                        <a:t>Compliance screen</a:t>
                       </a:r>
                       <a:endParaRPr lang="en-US" sz="1000" dirty="0">
                         <a:latin typeface="Arial" charset="0"/>
@@ -10232,7 +10232,7 @@
                 <a:ea typeface="Arial" pitchFamily="34" charset="-122"/>
                 <a:cs typeface="Arial" pitchFamily="34" charset="-120"/>
               </a:rPr>
-              <a:t>* Concentration pass is directional — final ticket sizing is an Investment Committee decision, not asserted here.</a:t>
+              <a:t>* Concentration pass is directional, final ticket sizing is an Investment Committee decision, not asserted here.</a:t>
             </a:r>
             <a:endParaRPr lang="en-US" sz="850" dirty="0"/>
           </a:p>
@@ -10486,7 +10486,7 @@
                 <a:ea typeface="Arial" pitchFamily="34" charset="-122"/>
                 <a:cs typeface="Arial" pitchFamily="34" charset="-120"/>
               </a:rPr>
-              <a:t>BUY  ·  Target price SAR 14.36 (+12.3% upside)  ·  Weighted return 16.8% vs 15.0% hurdle  ·  Risk score 5.5/10  ·  Shariah PASS</a:t>
+              <a:t>BUY  ·  Target price SAR 14.36 (+12.3% upside)  ·  Weighted return 16.8% vs 15.0% hurdle  ·  Risk score 5.5/10  ·  Compliance PASS</a:t>
             </a:r>
             <a:endParaRPr lang="en-US" sz="1100" dirty="0"/>
           </a:p>
@@ -10525,7 +10525,7 @@
                 <a:ea typeface="Arial" pitchFamily="34" charset="-122"/>
                 <a:cs typeface="Arial" pitchFamily="34" charset="-120"/>
               </a:rPr>
-              <a:t>Advisory only — the investment decision rests with the committee.</a:t>
+              <a:t>Advisory only: the investment decision rests with the committee.</a:t>
             </a:r>
             <a:endParaRPr lang="en-US" sz="1500" dirty="0"/>
           </a:p>
@@ -10564,7 +10564,7 @@
                 <a:ea typeface="Arial" pitchFamily="34" charset="-122"/>
                 <a:cs typeface="Arial" pitchFamily="34" charset="-120"/>
               </a:rPr>
-              <a:t>Full source trail: IC memo and Excel valuation workbook — every figure traces to a corpus document page.</a:t>
+              <a:t>Full source trail: IC memo and Excel valuation workbook, every figure traces to a corpus document page.</a:t>
             </a:r>
             <a:endParaRPr lang="en-US" sz="800" dirty="0"/>
           </a:p>

--- a/public/artifacts/jahez-board-deck.pptx
+++ b/public/artifacts/jahez-board-deck.pptx
@@ -1897,7 +1897,7 @@
                 <a:ea typeface="Arial" pitchFamily="34" charset="-122"/>
                 <a:cs typeface="Arial" pitchFamily="34" charset="-120"/>
               </a:rPr>
-              <a:t>BUY  ·  Target price SAR 14.36  ·  +12.3% upside vs SAR 12.79 close  ·  Base IRR 17.1%  ·  Weighted return 16.8% vs 15.0% hurdle</a:t>
+              <a:t>BUY  ·  Target price SAR 14.36  ·  +12.3% upside vs SAR 12.79 close  ·  Base IRR 17.1%  ·  Weighted return 16.8% vs 15.0% benchmark</a:t>
             </a:r>
             <a:endParaRPr lang="en-US" sz="1250" dirty="0"/>
           </a:p>
@@ -2275,7 +2275,7 @@
                 <a:ea typeface="Arial" pitchFamily="34" charset="-122"/>
                 <a:cs typeface="Arial" pitchFamily="34" charset="-120"/>
               </a:rPr>
-              <a:t>Compliance PASS, SAR 16.6m net cash, Tadawul-listed liquidity, clears Lunar's 15.0% hurdle at a 16.8% weighted return</a:t>
+              <a:t>Compliance PASS, SAR 16.6m net cash, Tadawul-listed liquidity, clears Lunar's 15.0% benchmark at a 16.8% weighted return</a:t>
             </a:r>
             <a:endParaRPr lang="en-US" sz="1050" dirty="0"/>
           </a:p>
@@ -4779,7 +4779,7 @@
                 <a:ea typeface="Georgia" pitchFamily="34" charset="-122"/>
                 <a:cs typeface="Georgia" pitchFamily="34" charset="-120"/>
               </a:rPr>
-              <a:t>Scenario IRRs vs the 15% Hurdle</a:t>
+              <a:t>Scenario IRRs vs the 15% Benchmark</a:t>
             </a:r>
             <a:endParaRPr lang="en-US" sz="2300" dirty="0"/>
           </a:p>
@@ -5212,7 +5212,7 @@
                 <a:ea typeface="Arial" pitchFamily="34" charset="-122"/>
                 <a:cs typeface="Arial" pitchFamily="34" charset="-120"/>
               </a:rPr>
-              <a:t>Lunar hurdle, 15.0%</a:t>
+              <a:t>Lunar benchmark, 15.0%</a:t>
             </a:r>
             <a:endParaRPr lang="en-US" sz="1000" dirty="0"/>
           </a:p>
@@ -9165,7 +9165,7 @@
                           <a:ea typeface="Arial" pitchFamily="34" charset="-122"/>
                           <a:cs typeface="Arial" pitchFamily="34" charset="-120"/>
                         </a:rPr>
-                        <a:t>IRR hurdle (15%)</a:t>
+                        <a:t>IRR benchmark (15%)</a:t>
                       </a:r>
                       <a:endParaRPr lang="en-US" sz="1000" dirty="0">
                         <a:latin typeface="Arial" charset="0"/>
@@ -9295,7 +9295,7 @@
                           <a:ea typeface="Arial" pitchFamily="34" charset="-122"/>
                           <a:cs typeface="Arial" pitchFamily="34" charset="-120"/>
                         </a:rPr>
-                        <a:t>Weighted return 16.8% vs 15.0% hurdle</a:t>
+                        <a:t>Weighted return 16.8% vs 15.0% benchmark</a:t>
                       </a:r>
                       <a:endParaRPr lang="en-US" sz="1000" dirty="0">
                         <a:latin typeface="Arial" charset="0"/>
@@ -10486,7 +10486,7 @@
                 <a:ea typeface="Arial" pitchFamily="34" charset="-122"/>
                 <a:cs typeface="Arial" pitchFamily="34" charset="-120"/>
               </a:rPr>
-              <a:t>BUY  ·  Target price SAR 14.36 (+12.3% upside)  ·  Weighted return 16.8% vs 15.0% hurdle  ·  Risk score 5.5/10  ·  Compliance PASS</a:t>
+              <a:t>BUY  ·  Target price SAR 14.36 (+12.3% upside)  ·  Weighted return 16.8% vs 15.0% benchmark  ·  Risk score 5.5/10  ·  Compliance PASS</a:t>
             </a:r>
             <a:endParaRPr lang="en-US" sz="1100" dirty="0"/>
           </a:p>
